--- a/docs/presentation/IPI_Head_Separation_PoC_5th [26-09-XX].pptx
+++ b/docs/presentation/IPI_Head_Separation_PoC_5th [26-09-XX].pptx
@@ -3634,7 +3634,7 @@
                 <a:ea typeface="Malgun Gothic"/>
                 <a:cs typeface="Malgun Gothic"/>
               </a:rPr>
-              <a:t>: 수동 device_map으로 자체 헤드 탐색 가능. 자체 헤드가 8B 전이 헤드보다 뚜렷이 강하게 작동(전이 헤드는 net 효과 없음). heldout 표본 4배 확대(15→60)에도 net 억제 유지 — important_instructions에서 utility 첫 손상 발견(원인 특정).</a:t>
+              <a:t>: 수동 device_map으로 자체 헤드 탐색 가능. 자체 헤드가 8B 전이 헤드보다 뚜렷이 강하게 작동(전이 헤드는 순억제 효과 없음). heldout 표본 4배 확대(15→60)에도 순억제 유지 — important_instructions에서 utility 첫 손상 발견(원인 특정).</a:t>
             </a:r>
           </a:p>
           <a:p>
@@ -3677,7 +3677,7 @@
                 <a:ea typeface="Malgun Gothic"/>
                 <a:cs typeface="Malgun Gothic"/>
               </a:rPr>
-              <a:t> — travel·workspace는 A6000(48GB)로도 100% OOM. banking은 knockout 신호가 약함(net+1)지만 utility는 오히려 개선.</a:t>
+              <a:t> — travel·workspace는 A6000(48GB)로도 100% OOM. banking은 knockout 신호가 약함(순억제 +1)지만 utility는 오히려 개선.</a:t>
             </a:r>
           </a:p>
           <a:p>
@@ -7486,7 +7486,7 @@
         </p:nvGraphicFramePr>
         <p:xfrm>
           <a:off x="640080" y="1920240"/>
-          <a:ext cx="10908791" cy="1536192"/>
+          <a:ext cx="10908790" cy="1536192"/>
         </p:xfrm>
         <a:graphic>
           <a:graphicData uri="http://schemas.openxmlformats.org/drawingml/2006/table">
@@ -7495,12 +7495,14 @@
                 <a:tableStyleId>{5C22544A-7EE6-4342-B048-85BDC9FD1C3A}</a:tableStyleId>
               </a:tblPr>
               <a:tblGrid>
-                <a:gridCol w="2832090"/>
-                <a:gridCol w="1888060"/>
-                <a:gridCol w="1363599"/>
-                <a:gridCol w="1363599"/>
-                <a:gridCol w="1363599"/>
-                <a:gridCol w="2097844"/>
+                <a:gridCol w="2369081"/>
+                <a:gridCol w="1487562"/>
+                <a:gridCol w="1046803"/>
+                <a:gridCol w="1046803"/>
+                <a:gridCol w="1046803"/>
+                <a:gridCol w="1046803"/>
+                <a:gridCol w="1156993"/>
+                <a:gridCol w="1707942"/>
               </a:tblGrid>
               <a:tr h="292608">
                 <a:tc>
@@ -7514,7 +7516,7 @@
                         </a:lnSpc>
                       </a:pPr>
                       <a:r>
-                        <a:rPr sz="900" b="1">
+                        <a:rPr sz="850" b="1">
                           <a:solidFill>
                             <a:srgbClr val="8B9099"/>
                           </a:solidFill>
@@ -7543,7 +7545,7 @@
                         </a:lnSpc>
                       </a:pPr>
                       <a:r>
-                        <a:rPr sz="900" b="1">
+                        <a:rPr sz="850" b="1">
                           <a:solidFill>
                             <a:srgbClr val="8B9099"/>
                           </a:solidFill>
@@ -7572,7 +7574,7 @@
                         </a:lnSpc>
                       </a:pPr>
                       <a:r>
-                        <a:rPr sz="900" b="1">
+                        <a:rPr sz="850" b="1">
                           <a:solidFill>
                             <a:srgbClr val="8B9099"/>
                           </a:solidFill>
@@ -7580,6 +7582,64 @@
                           <a:ea typeface="Malgun Gothic"/>
                           <a:cs typeface="Malgun Gothic"/>
                         </a:rPr>
+                        <a:t>k0 util</a:t>
+                      </a:r>
+                    </a:p>
+                  </a:txBody>
+                  <a:tcPr marL="82296" marR="82296" marT="41148" marB="41148" anchor="ctr">
+                    <a:solidFill>
+                      <a:srgbClr val="E9EAED"/>
+                    </a:solidFill>
+                  </a:tcPr>
+                </a:tc>
+                <a:tc>
+                  <a:txBody>
+                    <a:bodyPr wrap="square"/>
+                    <a:lstStyle/>
+                    <a:p>
+                      <a:pPr algn="r">
+                        <a:lnSpc>
+                          <a:spcPct val="100000"/>
+                        </a:lnSpc>
+                      </a:pPr>
+                      <a:r>
+                        <a:rPr sz="850" b="1">
+                          <a:solidFill>
+                            <a:srgbClr val="8B9099"/>
+                          </a:solidFill>
+                          <a:latin typeface="Malgun Gothic"/>
+                          <a:ea typeface="Malgun Gothic"/>
+                          <a:cs typeface="Malgun Gothic"/>
+                        </a:rPr>
+                        <a:t>kN util</a:t>
+                      </a:r>
+                    </a:p>
+                  </a:txBody>
+                  <a:tcPr marL="82296" marR="82296" marT="41148" marB="41148" anchor="ctr">
+                    <a:solidFill>
+                      <a:srgbClr val="E9EAED"/>
+                    </a:solidFill>
+                  </a:tcPr>
+                </a:tc>
+                <a:tc>
+                  <a:txBody>
+                    <a:bodyPr wrap="square"/>
+                    <a:lstStyle/>
+                    <a:p>
+                      <a:pPr algn="r">
+                        <a:lnSpc>
+                          <a:spcPct val="100000"/>
+                        </a:lnSpc>
+                      </a:pPr>
+                      <a:r>
+                        <a:rPr sz="850" b="1">
+                          <a:solidFill>
+                            <a:srgbClr val="8B9099"/>
+                          </a:solidFill>
+                          <a:latin typeface="Malgun Gothic"/>
+                          <a:ea typeface="Malgun Gothic"/>
+                          <a:cs typeface="Malgun Gothic"/>
+                        </a:rPr>
                         <a:t>k0 sec</a:t>
                       </a:r>
                     </a:p>
@@ -7601,7 +7661,7 @@
                         </a:lnSpc>
                       </a:pPr>
                       <a:r>
-                        <a:rPr sz="900" b="1">
+                        <a:rPr sz="850" b="1">
                           <a:solidFill>
                             <a:srgbClr val="8B9099"/>
                           </a:solidFill>
@@ -7630,7 +7690,7 @@
                         </a:lnSpc>
                       </a:pPr>
                       <a:r>
-                        <a:rPr sz="900" b="1">
+                        <a:rPr sz="850" b="1">
                           <a:solidFill>
                             <a:srgbClr val="8B9099"/>
                           </a:solidFill>
@@ -7659,7 +7719,7 @@
                         </a:lnSpc>
                       </a:pPr>
                       <a:r>
-                        <a:rPr sz="900" b="1">
+                        <a:rPr sz="850" b="1">
                           <a:solidFill>
                             <a:srgbClr val="8B9099"/>
                           </a:solidFill>
@@ -7667,7 +7727,7 @@
                           <a:ea typeface="Malgun Gothic"/>
                           <a:cs typeface="Malgun Gothic"/>
                         </a:rPr>
-                        <a:t>net</a:t>
+                        <a:t>순억제</a:t>
                       </a:r>
                     </a:p>
                   </a:txBody>
@@ -7690,7 +7750,7 @@
                         </a:lnSpc>
                       </a:pPr>
                       <a:r>
-                        <a:rPr sz="900" b="0">
+                        <a:rPr sz="850" b="0">
                           <a:solidFill>
                             <a:srgbClr val="565C66"/>
                           </a:solidFill>
@@ -7719,7 +7779,7 @@
                         </a:lnSpc>
                       </a:pPr>
                       <a:r>
-                        <a:rPr sz="900" b="0">
+                        <a:rPr sz="850" b="0">
                           <a:solidFill>
                             <a:srgbClr val="565C66"/>
                           </a:solidFill>
@@ -7748,7 +7808,7 @@
                         </a:lnSpc>
                       </a:pPr>
                       <a:r>
-                        <a:rPr sz="900" b="0">
+                        <a:rPr sz="850" b="0">
                           <a:solidFill>
                             <a:srgbClr val="565C66"/>
                           </a:solidFill>
@@ -7756,6 +7816,64 @@
                           <a:ea typeface="Malgun Gothic"/>
                           <a:cs typeface="Malgun Gothic"/>
                         </a:rPr>
+                        <a:t>0.181</a:t>
+                      </a:r>
+                    </a:p>
+                  </a:txBody>
+                  <a:tcPr marL="82296" marR="82296" marT="41148" marB="41148" anchor="ctr">
+                    <a:solidFill>
+                      <a:srgbClr val="FFFFFF"/>
+                    </a:solidFill>
+                  </a:tcPr>
+                </a:tc>
+                <a:tc>
+                  <a:txBody>
+                    <a:bodyPr wrap="square"/>
+                    <a:lstStyle/>
+                    <a:p>
+                      <a:pPr algn="r">
+                        <a:lnSpc>
+                          <a:spcPct val="115000"/>
+                        </a:lnSpc>
+                      </a:pPr>
+                      <a:r>
+                        <a:rPr sz="850" b="0">
+                          <a:solidFill>
+                            <a:srgbClr val="565C66"/>
+                          </a:solidFill>
+                          <a:latin typeface="Malgun Gothic"/>
+                          <a:ea typeface="Malgun Gothic"/>
+                          <a:cs typeface="Malgun Gothic"/>
+                        </a:rPr>
+                        <a:t>0.190</a:t>
+                      </a:r>
+                    </a:p>
+                  </a:txBody>
+                  <a:tcPr marL="82296" marR="82296" marT="41148" marB="41148" anchor="ctr">
+                    <a:solidFill>
+                      <a:srgbClr val="FFFFFF"/>
+                    </a:solidFill>
+                  </a:tcPr>
+                </a:tc>
+                <a:tc>
+                  <a:txBody>
+                    <a:bodyPr wrap="square"/>
+                    <a:lstStyle/>
+                    <a:p>
+                      <a:pPr algn="r">
+                        <a:lnSpc>
+                          <a:spcPct val="115000"/>
+                        </a:lnSpc>
+                      </a:pPr>
+                      <a:r>
+                        <a:rPr sz="850" b="0">
+                          <a:solidFill>
+                            <a:srgbClr val="565C66"/>
+                          </a:solidFill>
+                          <a:latin typeface="Malgun Gothic"/>
+                          <a:ea typeface="Malgun Gothic"/>
+                          <a:cs typeface="Malgun Gothic"/>
+                        </a:rPr>
                         <a:t>0.276</a:t>
                       </a:r>
                     </a:p>
@@ -7777,7 +7895,7 @@
                         </a:lnSpc>
                       </a:pPr>
                       <a:r>
-                        <a:rPr sz="900" b="0">
+                        <a:rPr sz="850" b="0">
                           <a:solidFill>
                             <a:srgbClr val="565C66"/>
                           </a:solidFill>
@@ -7806,7 +7924,7 @@
                         </a:lnSpc>
                       </a:pPr>
                       <a:r>
-                        <a:rPr sz="900" b="0">
+                        <a:rPr sz="850" b="0">
                           <a:solidFill>
                             <a:srgbClr val="565C66"/>
                           </a:solidFill>
@@ -7835,7 +7953,7 @@
                         </a:lnSpc>
                       </a:pPr>
                       <a:r>
-                        <a:rPr sz="900" b="1">
+                        <a:rPr sz="850" b="1">
                           <a:solidFill>
                             <a:srgbClr val="C1442A"/>
                           </a:solidFill>
@@ -7866,7 +7984,7 @@
                         </a:lnSpc>
                       </a:pPr>
                       <a:r>
-                        <a:rPr sz="900" b="0">
+                        <a:rPr sz="850" b="0">
                           <a:solidFill>
                             <a:srgbClr val="565C66"/>
                           </a:solidFill>
@@ -7895,7 +8013,7 @@
                         </a:lnSpc>
                       </a:pPr>
                       <a:r>
-                        <a:rPr sz="900" b="1">
+                        <a:rPr sz="850" b="1">
                           <a:solidFill>
                             <a:srgbClr val="2F6FCE"/>
                           </a:solidFill>
@@ -7924,7 +8042,7 @@
                         </a:lnSpc>
                       </a:pPr>
                       <a:r>
-                        <a:rPr sz="900" b="0">
+                        <a:rPr sz="850" b="0">
                           <a:solidFill>
                             <a:srgbClr val="565C66"/>
                           </a:solidFill>
@@ -7932,6 +8050,64 @@
                           <a:ea typeface="Malgun Gothic"/>
                           <a:cs typeface="Malgun Gothic"/>
                         </a:rPr>
+                        <a:t>0.181</a:t>
+                      </a:r>
+                    </a:p>
+                  </a:txBody>
+                  <a:tcPr marL="82296" marR="82296" marT="41148" marB="41148" anchor="ctr">
+                    <a:solidFill>
+                      <a:srgbClr val="F7F7F9"/>
+                    </a:solidFill>
+                  </a:tcPr>
+                </a:tc>
+                <a:tc>
+                  <a:txBody>
+                    <a:bodyPr wrap="square"/>
+                    <a:lstStyle/>
+                    <a:p>
+                      <a:pPr algn="r">
+                        <a:lnSpc>
+                          <a:spcPct val="115000"/>
+                        </a:lnSpc>
+                      </a:pPr>
+                      <a:r>
+                        <a:rPr sz="850" b="0">
+                          <a:solidFill>
+                            <a:srgbClr val="565C66"/>
+                          </a:solidFill>
+                          <a:latin typeface="Malgun Gothic"/>
+                          <a:ea typeface="Malgun Gothic"/>
+                          <a:cs typeface="Malgun Gothic"/>
+                        </a:rPr>
+                        <a:t>0.190</a:t>
+                      </a:r>
+                    </a:p>
+                  </a:txBody>
+                  <a:tcPr marL="82296" marR="82296" marT="41148" marB="41148" anchor="ctr">
+                    <a:solidFill>
+                      <a:srgbClr val="F7F7F9"/>
+                    </a:solidFill>
+                  </a:tcPr>
+                </a:tc>
+                <a:tc>
+                  <a:txBody>
+                    <a:bodyPr wrap="square"/>
+                    <a:lstStyle/>
+                    <a:p>
+                      <a:pPr algn="r">
+                        <a:lnSpc>
+                          <a:spcPct val="115000"/>
+                        </a:lnSpc>
+                      </a:pPr>
+                      <a:r>
+                        <a:rPr sz="850" b="0">
+                          <a:solidFill>
+                            <a:srgbClr val="565C66"/>
+                          </a:solidFill>
+                          <a:latin typeface="Malgun Gothic"/>
+                          <a:ea typeface="Malgun Gothic"/>
+                          <a:cs typeface="Malgun Gothic"/>
+                        </a:rPr>
                         <a:t>0.276</a:t>
                       </a:r>
                     </a:p>
@@ -7953,7 +8129,7 @@
                         </a:lnSpc>
                       </a:pPr>
                       <a:r>
-                        <a:rPr sz="900" b="1">
+                        <a:rPr sz="850" b="1">
                           <a:solidFill>
                             <a:srgbClr val="16181D"/>
                           </a:solidFill>
@@ -7982,7 +8158,7 @@
                         </a:lnSpc>
                       </a:pPr>
                       <a:r>
-                        <a:rPr sz="900" b="0">
+                        <a:rPr sz="850" b="0">
                           <a:solidFill>
                             <a:srgbClr val="565C66"/>
                           </a:solidFill>
@@ -8011,7 +8187,7 @@
                         </a:lnSpc>
                       </a:pPr>
                       <a:r>
-                        <a:rPr sz="900" b="1">
+                        <a:rPr sz="850" b="1">
                           <a:solidFill>
                             <a:srgbClr val="2F6FCE"/>
                           </a:solidFill>
@@ -8042,7 +8218,7 @@
                         </a:lnSpc>
                       </a:pPr>
                       <a:r>
-                        <a:rPr sz="900" b="0">
+                        <a:rPr sz="850" b="0">
                           <a:solidFill>
                             <a:srgbClr val="565C66"/>
                           </a:solidFill>
@@ -8071,7 +8247,7 @@
                         </a:lnSpc>
                       </a:pPr>
                       <a:r>
-                        <a:rPr sz="900" b="0">
+                        <a:rPr sz="850" b="0">
                           <a:solidFill>
                             <a:srgbClr val="565C66"/>
                           </a:solidFill>
@@ -8100,7 +8276,7 @@
                         </a:lnSpc>
                       </a:pPr>
                       <a:r>
-                        <a:rPr sz="900" b="0">
+                        <a:rPr sz="850" b="0">
                           <a:solidFill>
                             <a:srgbClr val="565C66"/>
                           </a:solidFill>
@@ -8108,6 +8284,64 @@
                           <a:ea typeface="Malgun Gothic"/>
                           <a:cs typeface="Malgun Gothic"/>
                         </a:rPr>
+                        <a:t>0.176</a:t>
+                      </a:r>
+                    </a:p>
+                  </a:txBody>
+                  <a:tcPr marL="82296" marR="82296" marT="41148" marB="41148" anchor="ctr">
+                    <a:solidFill>
+                      <a:srgbClr val="FFFFFF"/>
+                    </a:solidFill>
+                  </a:tcPr>
+                </a:tc>
+                <a:tc>
+                  <a:txBody>
+                    <a:bodyPr wrap="square"/>
+                    <a:lstStyle/>
+                    <a:p>
+                      <a:pPr algn="r">
+                        <a:lnSpc>
+                          <a:spcPct val="115000"/>
+                        </a:lnSpc>
+                      </a:pPr>
+                      <a:r>
+                        <a:rPr sz="850" b="0">
+                          <a:solidFill>
+                            <a:srgbClr val="565C66"/>
+                          </a:solidFill>
+                          <a:latin typeface="Malgun Gothic"/>
+                          <a:ea typeface="Malgun Gothic"/>
+                          <a:cs typeface="Malgun Gothic"/>
+                        </a:rPr>
+                        <a:t>0.186</a:t>
+                      </a:r>
+                    </a:p>
+                  </a:txBody>
+                  <a:tcPr marL="82296" marR="82296" marT="41148" marB="41148" anchor="ctr">
+                    <a:solidFill>
+                      <a:srgbClr val="FFFFFF"/>
+                    </a:solidFill>
+                  </a:tcPr>
+                </a:tc>
+                <a:tc>
+                  <a:txBody>
+                    <a:bodyPr wrap="square"/>
+                    <a:lstStyle/>
+                    <a:p>
+                      <a:pPr algn="r">
+                        <a:lnSpc>
+                          <a:spcPct val="115000"/>
+                        </a:lnSpc>
+                      </a:pPr>
+                      <a:r>
+                        <a:rPr sz="850" b="0">
+                          <a:solidFill>
+                            <a:srgbClr val="565C66"/>
+                          </a:solidFill>
+                          <a:latin typeface="Malgun Gothic"/>
+                          <a:ea typeface="Malgun Gothic"/>
+                          <a:cs typeface="Malgun Gothic"/>
+                        </a:rPr>
                         <a:t>0.402</a:t>
                       </a:r>
                     </a:p>
@@ -8129,7 +8363,7 @@
                         </a:lnSpc>
                       </a:pPr>
                       <a:r>
-                        <a:rPr sz="900" b="0">
+                        <a:rPr sz="850" b="0">
                           <a:solidFill>
                             <a:srgbClr val="565C66"/>
                           </a:solidFill>
@@ -8158,7 +8392,7 @@
                         </a:lnSpc>
                       </a:pPr>
                       <a:r>
-                        <a:rPr sz="900" b="0">
+                        <a:rPr sz="850" b="0">
                           <a:solidFill>
                             <a:srgbClr val="565C66"/>
                           </a:solidFill>
@@ -8187,7 +8421,7 @@
                         </a:lnSpc>
                       </a:pPr>
                       <a:r>
-                        <a:rPr sz="900" b="1">
+                        <a:rPr sz="850" b="1">
                           <a:solidFill>
                             <a:srgbClr val="C1442A"/>
                           </a:solidFill>
@@ -8218,7 +8452,7 @@
                         </a:lnSpc>
                       </a:pPr>
                       <a:r>
-                        <a:rPr sz="900" b="0">
+                        <a:rPr sz="850" b="0">
                           <a:solidFill>
                             <a:srgbClr val="565C66"/>
                           </a:solidFill>
@@ -8247,7 +8481,7 @@
                         </a:lnSpc>
                       </a:pPr>
                       <a:r>
-                        <a:rPr sz="900" b="1">
+                        <a:rPr sz="850" b="1">
                           <a:solidFill>
                             <a:srgbClr val="2F6FCE"/>
                           </a:solidFill>
@@ -8276,7 +8510,7 @@
                         </a:lnSpc>
                       </a:pPr>
                       <a:r>
-                        <a:rPr sz="900" b="0">
+                        <a:rPr sz="850" b="0">
                           <a:solidFill>
                             <a:srgbClr val="565C66"/>
                           </a:solidFill>
@@ -8284,6 +8518,64 @@
                           <a:ea typeface="Malgun Gothic"/>
                           <a:cs typeface="Malgun Gothic"/>
                         </a:rPr>
+                        <a:t>0.175</a:t>
+                      </a:r>
+                    </a:p>
+                  </a:txBody>
+                  <a:tcPr marL="82296" marR="82296" marT="41148" marB="41148" anchor="ctr">
+                    <a:solidFill>
+                      <a:srgbClr val="F7F7F9"/>
+                    </a:solidFill>
+                  </a:tcPr>
+                </a:tc>
+                <a:tc>
+                  <a:txBody>
+                    <a:bodyPr wrap="square"/>
+                    <a:lstStyle/>
+                    <a:p>
+                      <a:pPr algn="r">
+                        <a:lnSpc>
+                          <a:spcPct val="115000"/>
+                        </a:lnSpc>
+                      </a:pPr>
+                      <a:r>
+                        <a:rPr sz="850" b="0">
+                          <a:solidFill>
+                            <a:srgbClr val="565C66"/>
+                          </a:solidFill>
+                          <a:latin typeface="Malgun Gothic"/>
+                          <a:ea typeface="Malgun Gothic"/>
+                          <a:cs typeface="Malgun Gothic"/>
+                        </a:rPr>
+                        <a:t>0.204</a:t>
+                      </a:r>
+                    </a:p>
+                  </a:txBody>
+                  <a:tcPr marL="82296" marR="82296" marT="41148" marB="41148" anchor="ctr">
+                    <a:solidFill>
+                      <a:srgbClr val="F7F7F9"/>
+                    </a:solidFill>
+                  </a:tcPr>
+                </a:tc>
+                <a:tc>
+                  <a:txBody>
+                    <a:bodyPr wrap="square"/>
+                    <a:lstStyle/>
+                    <a:p>
+                      <a:pPr algn="r">
+                        <a:lnSpc>
+                          <a:spcPct val="115000"/>
+                        </a:lnSpc>
+                      </a:pPr>
+                      <a:r>
+                        <a:rPr sz="850" b="0">
+                          <a:solidFill>
+                            <a:srgbClr val="565C66"/>
+                          </a:solidFill>
+                          <a:latin typeface="Malgun Gothic"/>
+                          <a:ea typeface="Malgun Gothic"/>
+                          <a:cs typeface="Malgun Gothic"/>
+                        </a:rPr>
                         <a:t>0.398</a:t>
                       </a:r>
                     </a:p>
@@ -8305,7 +8597,7 @@
                         </a:lnSpc>
                       </a:pPr>
                       <a:r>
-                        <a:rPr sz="900" b="1">
+                        <a:rPr sz="850" b="1">
                           <a:solidFill>
                             <a:srgbClr val="16181D"/>
                           </a:solidFill>
@@ -8334,7 +8626,7 @@
                         </a:lnSpc>
                       </a:pPr>
                       <a:r>
-                        <a:rPr sz="900" b="0">
+                        <a:rPr sz="850" b="0">
                           <a:solidFill>
                             <a:srgbClr val="565C66"/>
                           </a:solidFill>
@@ -8363,7 +8655,7 @@
                         </a:lnSpc>
                       </a:pPr>
                       <a:r>
-                        <a:rPr sz="900" b="1">
+                        <a:rPr sz="850" b="1">
                           <a:solidFill>
                             <a:srgbClr val="2F6FCE"/>
                           </a:solidFill>
@@ -8437,7 +8729,7 @@
         </p:nvGraphicFramePr>
         <p:xfrm>
           <a:off x="640080" y="4023360"/>
-          <a:ext cx="10908791" cy="1956816"/>
+          <a:ext cx="10908787" cy="1956816"/>
         </p:xfrm>
         <a:graphic>
           <a:graphicData uri="http://schemas.openxmlformats.org/drawingml/2006/table">
@@ -8446,14 +8738,15 @@
                 <a:tableStyleId>{5C22544A-7EE6-4342-B048-85BDC9FD1C3A}</a:tableStyleId>
               </a:tblPr>
               <a:tblGrid>
-                <a:gridCol w="1371600"/>
-                <a:gridCol w="1737360"/>
-                <a:gridCol w="914400"/>
-                <a:gridCol w="1051560"/>
-                <a:gridCol w="1051560"/>
-                <a:gridCol w="1691640"/>
-                <a:gridCol w="1600200"/>
-                <a:gridCol w="1490471"/>
+                <a:gridCol w="1313095"/>
+                <a:gridCol w="1717124"/>
+                <a:gridCol w="858562"/>
+                <a:gridCol w="959569"/>
+                <a:gridCol w="959569"/>
+                <a:gridCol w="959569"/>
+                <a:gridCol w="959569"/>
+                <a:gridCol w="1717124"/>
+                <a:gridCol w="1464606"/>
               </a:tblGrid>
               <a:tr h="310896">
                 <a:tc>
@@ -8467,7 +8760,7 @@
                         </a:lnSpc>
                       </a:pPr>
                       <a:r>
-                        <a:rPr sz="850" b="1">
+                        <a:rPr sz="800" b="1">
                           <a:solidFill>
                             <a:srgbClr val="8B9099"/>
                           </a:solidFill>
@@ -8496,7 +8789,7 @@
                         </a:lnSpc>
                       </a:pPr>
                       <a:r>
-                        <a:rPr sz="850" b="1">
+                        <a:rPr sz="800" b="1">
                           <a:solidFill>
                             <a:srgbClr val="8B9099"/>
                           </a:solidFill>
@@ -8525,7 +8818,7 @@
                         </a:lnSpc>
                       </a:pPr>
                       <a:r>
-                        <a:rPr sz="850" b="1">
+                        <a:rPr sz="800" b="1">
                           <a:solidFill>
                             <a:srgbClr val="8B9099"/>
                           </a:solidFill>
@@ -8554,7 +8847,7 @@
                         </a:lnSpc>
                       </a:pPr>
                       <a:r>
-                        <a:rPr sz="850" b="1">
+                        <a:rPr sz="800" b="1">
                           <a:solidFill>
                             <a:srgbClr val="8B9099"/>
                           </a:solidFill>
@@ -8562,6 +8855,64 @@
                           <a:ea typeface="Malgun Gothic"/>
                           <a:cs typeface="Malgun Gothic"/>
                         </a:rPr>
+                        <a:t>k0 util</a:t>
+                      </a:r>
+                    </a:p>
+                  </a:txBody>
+                  <a:tcPr marL="82296" marR="82296" marT="41148" marB="41148" anchor="ctr">
+                    <a:solidFill>
+                      <a:srgbClr val="E9EAED"/>
+                    </a:solidFill>
+                  </a:tcPr>
+                </a:tc>
+                <a:tc>
+                  <a:txBody>
+                    <a:bodyPr wrap="square"/>
+                    <a:lstStyle/>
+                    <a:p>
+                      <a:pPr algn="r">
+                        <a:lnSpc>
+                          <a:spcPct val="100000"/>
+                        </a:lnSpc>
+                      </a:pPr>
+                      <a:r>
+                        <a:rPr sz="800" b="1">
+                          <a:solidFill>
+                            <a:srgbClr val="8B9099"/>
+                          </a:solidFill>
+                          <a:latin typeface="Malgun Gothic"/>
+                          <a:ea typeface="Malgun Gothic"/>
+                          <a:cs typeface="Malgun Gothic"/>
+                        </a:rPr>
+                        <a:t>kN util</a:t>
+                      </a:r>
+                    </a:p>
+                  </a:txBody>
+                  <a:tcPr marL="82296" marR="82296" marT="41148" marB="41148" anchor="ctr">
+                    <a:solidFill>
+                      <a:srgbClr val="E9EAED"/>
+                    </a:solidFill>
+                  </a:tcPr>
+                </a:tc>
+                <a:tc>
+                  <a:txBody>
+                    <a:bodyPr wrap="square"/>
+                    <a:lstStyle/>
+                    <a:p>
+                      <a:pPr algn="r">
+                        <a:lnSpc>
+                          <a:spcPct val="100000"/>
+                        </a:lnSpc>
+                      </a:pPr>
+                      <a:r>
+                        <a:rPr sz="800" b="1">
+                          <a:solidFill>
+                            <a:srgbClr val="8B9099"/>
+                          </a:solidFill>
+                          <a:latin typeface="Malgun Gothic"/>
+                          <a:ea typeface="Malgun Gothic"/>
+                          <a:cs typeface="Malgun Gothic"/>
+                        </a:rPr>
                         <a:t>k0 sec</a:t>
                       </a:r>
                     </a:p>
@@ -8583,7 +8934,7 @@
                         </a:lnSpc>
                       </a:pPr>
                       <a:r>
-                        <a:rPr sz="850" b="1">
+                        <a:rPr sz="800" b="1">
                           <a:solidFill>
                             <a:srgbClr val="8B9099"/>
                           </a:solidFill>
@@ -8612,7 +8963,7 @@
                         </a:lnSpc>
                       </a:pPr>
                       <a:r>
-                        <a:rPr sz="850" b="1">
+                        <a:rPr sz="800" b="1">
                           <a:solidFill>
                             <a:srgbClr val="8B9099"/>
                           </a:solidFill>
@@ -8641,7 +8992,7 @@
                         </a:lnSpc>
                       </a:pPr>
                       <a:r>
-                        <a:rPr sz="850" b="1">
+                        <a:rPr sz="800" b="1">
                           <a:solidFill>
                             <a:srgbClr val="8B9099"/>
                           </a:solidFill>
@@ -8649,36 +9000,7 @@
                           <a:ea typeface="Malgun Gothic"/>
                           <a:cs typeface="Malgun Gothic"/>
                         </a:rPr>
-                        <a:t>net</a:t>
-                      </a:r>
-                    </a:p>
-                  </a:txBody>
-                  <a:tcPr marL="82296" marR="82296" marT="41148" marB="41148" anchor="ctr">
-                    <a:solidFill>
-                      <a:srgbClr val="E9EAED"/>
-                    </a:solidFill>
-                  </a:tcPr>
-                </a:tc>
-                <a:tc>
-                  <a:txBody>
-                    <a:bodyPr wrap="square"/>
-                    <a:lstStyle/>
-                    <a:p>
-                      <a:pPr algn="r">
-                        <a:lnSpc>
-                          <a:spcPct val="100000"/>
-                        </a:lnSpc>
-                      </a:pPr>
-                      <a:r>
-                        <a:rPr sz="850" b="1">
-                          <a:solidFill>
-                            <a:srgbClr val="8B9099"/>
-                          </a:solidFill>
-                          <a:latin typeface="Malgun Gothic"/>
-                          <a:ea typeface="Malgun Gothic"/>
-                          <a:cs typeface="Malgun Gothic"/>
-                        </a:rPr>
-                        <a:t>kN util</a:t>
+                        <a:t>순억제</a:t>
                       </a:r>
                     </a:p>
                   </a:txBody>
@@ -8701,7 +9023,7 @@
                         </a:lnSpc>
                       </a:pPr>
                       <a:r>
-                        <a:rPr sz="850" b="0">
+                        <a:rPr sz="800" b="0">
                           <a:solidFill>
                             <a:srgbClr val="565C66"/>
                           </a:solidFill>
@@ -8730,7 +9052,7 @@
                         </a:lnSpc>
                       </a:pPr>
                       <a:r>
-                        <a:rPr sz="850" b="0">
+                        <a:rPr sz="800" b="0">
                           <a:solidFill>
                             <a:srgbClr val="565C66"/>
                           </a:solidFill>
@@ -8759,7 +9081,7 @@
                         </a:lnSpc>
                       </a:pPr>
                       <a:r>
-                        <a:rPr sz="850" b="0">
+                        <a:rPr sz="800" b="0">
                           <a:solidFill>
                             <a:srgbClr val="565C66"/>
                           </a:solidFill>
@@ -8788,7 +9110,7 @@
                         </a:lnSpc>
                       </a:pPr>
                       <a:r>
-                        <a:rPr sz="850" b="0">
+                        <a:rPr sz="800" b="0">
                           <a:solidFill>
                             <a:srgbClr val="565C66"/>
                           </a:solidFill>
@@ -8796,6 +9118,64 @@
                           <a:ea typeface="Malgun Gothic"/>
                           <a:cs typeface="Malgun Gothic"/>
                         </a:rPr>
+                        <a:t>0.200</a:t>
+                      </a:r>
+                    </a:p>
+                  </a:txBody>
+                  <a:tcPr marL="82296" marR="82296" marT="41148" marB="41148" anchor="ctr">
+                    <a:solidFill>
+                      <a:srgbClr val="FFFFFF"/>
+                    </a:solidFill>
+                  </a:tcPr>
+                </a:tc>
+                <a:tc>
+                  <a:txBody>
+                    <a:bodyPr wrap="square"/>
+                    <a:lstStyle/>
+                    <a:p>
+                      <a:pPr algn="r">
+                        <a:lnSpc>
+                          <a:spcPct val="115000"/>
+                        </a:lnSpc>
+                      </a:pPr>
+                      <a:r>
+                        <a:rPr sz="800" b="1">
+                          <a:solidFill>
+                            <a:srgbClr val="C1442A"/>
+                          </a:solidFill>
+                          <a:latin typeface="Malgun Gothic"/>
+                          <a:ea typeface="Malgun Gothic"/>
+                          <a:cs typeface="Malgun Gothic"/>
+                        </a:rPr>
+                        <a:t>0.150 (↓)</a:t>
+                      </a:r>
+                    </a:p>
+                  </a:txBody>
+                  <a:tcPr marL="82296" marR="82296" marT="41148" marB="41148" anchor="ctr">
+                    <a:solidFill>
+                      <a:srgbClr val="FFFFFF"/>
+                    </a:solidFill>
+                  </a:tcPr>
+                </a:tc>
+                <a:tc>
+                  <a:txBody>
+                    <a:bodyPr wrap="square"/>
+                    <a:lstStyle/>
+                    <a:p>
+                      <a:pPr algn="r">
+                        <a:lnSpc>
+                          <a:spcPct val="115000"/>
+                        </a:lnSpc>
+                      </a:pPr>
+                      <a:r>
+                        <a:rPr sz="800" b="0">
+                          <a:solidFill>
+                            <a:srgbClr val="565C66"/>
+                          </a:solidFill>
+                          <a:latin typeface="Malgun Gothic"/>
+                          <a:ea typeface="Malgun Gothic"/>
+                          <a:cs typeface="Malgun Gothic"/>
+                        </a:rPr>
                         <a:t>0.250</a:t>
                       </a:r>
                     </a:p>
@@ -8817,7 +9197,7 @@
                         </a:lnSpc>
                       </a:pPr>
                       <a:r>
-                        <a:rPr sz="850" b="1">
+                        <a:rPr sz="800" b="1">
                           <a:solidFill>
                             <a:srgbClr val="16181D"/>
                           </a:solidFill>
@@ -8846,7 +9226,7 @@
                         </a:lnSpc>
                       </a:pPr>
                       <a:r>
-                        <a:rPr sz="850" b="0">
+                        <a:rPr sz="800" b="0">
                           <a:solidFill>
                             <a:srgbClr val="565C66"/>
                           </a:solidFill>
@@ -8875,7 +9255,7 @@
                         </a:lnSpc>
                       </a:pPr>
                       <a:r>
-                        <a:rPr sz="850" b="1">
+                        <a:rPr sz="800" b="1">
                           <a:solidFill>
                             <a:srgbClr val="2F6FCE"/>
                           </a:solidFill>
@@ -8884,35 +9264,6 @@
                           <a:cs typeface="Malgun Gothic"/>
                         </a:rPr>
                         <a:t>+8 (53%↓)</a:t>
-                      </a:r>
-                    </a:p>
-                  </a:txBody>
-                  <a:tcPr marL="82296" marR="82296" marT="41148" marB="41148" anchor="ctr">
-                    <a:solidFill>
-                      <a:srgbClr val="FFFFFF"/>
-                    </a:solidFill>
-                  </a:tcPr>
-                </a:tc>
-                <a:tc>
-                  <a:txBody>
-                    <a:bodyPr wrap="square"/>
-                    <a:lstStyle/>
-                    <a:p>
-                      <a:pPr algn="r">
-                        <a:lnSpc>
-                          <a:spcPct val="115000"/>
-                        </a:lnSpc>
-                      </a:pPr>
-                      <a:r>
-                        <a:rPr sz="850" b="1">
-                          <a:solidFill>
-                            <a:srgbClr val="C1442A"/>
-                          </a:solidFill>
-                          <a:latin typeface="Malgun Gothic"/>
-                          <a:ea typeface="Malgun Gothic"/>
-                          <a:cs typeface="Malgun Gothic"/>
-                        </a:rPr>
-                        <a:t>0.150 (↓)</a:t>
                       </a:r>
                     </a:p>
                   </a:txBody>
@@ -8935,7 +9286,7 @@
                         </a:lnSpc>
                       </a:pPr>
                       <a:r>
-                        <a:rPr sz="850" b="0">
+                        <a:rPr sz="800" b="0">
                           <a:solidFill>
                             <a:srgbClr val="565C66"/>
                           </a:solidFill>
@@ -8964,7 +9315,7 @@
                         </a:lnSpc>
                       </a:pPr>
                       <a:r>
-                        <a:rPr sz="850" b="0">
+                        <a:rPr sz="800" b="0">
                           <a:solidFill>
                             <a:srgbClr val="565C66"/>
                           </a:solidFill>
@@ -8993,7 +9344,7 @@
                         </a:lnSpc>
                       </a:pPr>
                       <a:r>
-                        <a:rPr sz="850" b="0">
+                        <a:rPr sz="800" b="0">
                           <a:solidFill>
                             <a:srgbClr val="565C66"/>
                           </a:solidFill>
@@ -9022,7 +9373,7 @@
                         </a:lnSpc>
                       </a:pPr>
                       <a:r>
-                        <a:rPr sz="850" b="0">
+                        <a:rPr sz="800" b="0">
                           <a:solidFill>
                             <a:srgbClr val="565C66"/>
                           </a:solidFill>
@@ -9030,6 +9381,64 @@
                           <a:ea typeface="Malgun Gothic"/>
                           <a:cs typeface="Malgun Gothic"/>
                         </a:rPr>
+                        <a:t>0.167</a:t>
+                      </a:r>
+                    </a:p>
+                  </a:txBody>
+                  <a:tcPr marL="82296" marR="82296" marT="41148" marB="41148" anchor="ctr">
+                    <a:solidFill>
+                      <a:srgbClr val="F7F7F9"/>
+                    </a:solidFill>
+                  </a:tcPr>
+                </a:tc>
+                <a:tc>
+                  <a:txBody>
+                    <a:bodyPr wrap="square"/>
+                    <a:lstStyle/>
+                    <a:p>
+                      <a:pPr algn="r">
+                        <a:lnSpc>
+                          <a:spcPct val="115000"/>
+                        </a:lnSpc>
+                      </a:pPr>
+                      <a:r>
+                        <a:rPr sz="800" b="1">
+                          <a:solidFill>
+                            <a:srgbClr val="2F6FCE"/>
+                          </a:solidFill>
+                          <a:latin typeface="Malgun Gothic"/>
+                          <a:ea typeface="Malgun Gothic"/>
+                          <a:cs typeface="Malgun Gothic"/>
+                        </a:rPr>
+                        <a:t>0.183 (↑)</a:t>
+                      </a:r>
+                    </a:p>
+                  </a:txBody>
+                  <a:tcPr marL="82296" marR="82296" marT="41148" marB="41148" anchor="ctr">
+                    <a:solidFill>
+                      <a:srgbClr val="F7F7F9"/>
+                    </a:solidFill>
+                  </a:tcPr>
+                </a:tc>
+                <a:tc>
+                  <a:txBody>
+                    <a:bodyPr wrap="square"/>
+                    <a:lstStyle/>
+                    <a:p>
+                      <a:pPr algn="r">
+                        <a:lnSpc>
+                          <a:spcPct val="115000"/>
+                        </a:lnSpc>
+                      </a:pPr>
+                      <a:r>
+                        <a:rPr sz="800" b="0">
+                          <a:solidFill>
+                            <a:srgbClr val="565C66"/>
+                          </a:solidFill>
+                          <a:latin typeface="Malgun Gothic"/>
+                          <a:ea typeface="Malgun Gothic"/>
+                          <a:cs typeface="Malgun Gothic"/>
+                        </a:rPr>
                         <a:t>0.350</a:t>
                       </a:r>
                     </a:p>
@@ -9051,7 +9460,7 @@
                         </a:lnSpc>
                       </a:pPr>
                       <a:r>
-                        <a:rPr sz="850" b="1">
+                        <a:rPr sz="800" b="1">
                           <a:solidFill>
                             <a:srgbClr val="16181D"/>
                           </a:solidFill>
@@ -9080,7 +9489,7 @@
                         </a:lnSpc>
                       </a:pPr>
                       <a:r>
-                        <a:rPr sz="850" b="0">
+                        <a:rPr sz="800" b="0">
                           <a:solidFill>
                             <a:srgbClr val="565C66"/>
                           </a:solidFill>
@@ -9109,7 +9518,7 @@
                         </a:lnSpc>
                       </a:pPr>
                       <a:r>
-                        <a:rPr sz="850" b="1">
+                        <a:rPr sz="800" b="1">
                           <a:solidFill>
                             <a:srgbClr val="2F6FCE"/>
                           </a:solidFill>
@@ -9118,35 +9527,6 @@
                           <a:cs typeface="Malgun Gothic"/>
                         </a:rPr>
                         <a:t>+8 (38%↓)</a:t>
-                      </a:r>
-                    </a:p>
-                  </a:txBody>
-                  <a:tcPr marL="82296" marR="82296" marT="41148" marB="41148" anchor="ctr">
-                    <a:solidFill>
-                      <a:srgbClr val="F7F7F9"/>
-                    </a:solidFill>
-                  </a:tcPr>
-                </a:tc>
-                <a:tc>
-                  <a:txBody>
-                    <a:bodyPr wrap="square"/>
-                    <a:lstStyle/>
-                    <a:p>
-                      <a:pPr algn="r">
-                        <a:lnSpc>
-                          <a:spcPct val="115000"/>
-                        </a:lnSpc>
-                      </a:pPr>
-                      <a:r>
-                        <a:rPr sz="850" b="1">
-                          <a:solidFill>
-                            <a:srgbClr val="2F6FCE"/>
-                          </a:solidFill>
-                          <a:latin typeface="Malgun Gothic"/>
-                          <a:ea typeface="Malgun Gothic"/>
-                          <a:cs typeface="Malgun Gothic"/>
-                        </a:rPr>
-                        <a:t>0.183 (↑)</a:t>
                       </a:r>
                     </a:p>
                   </a:txBody>
@@ -9169,7 +9549,7 @@
                         </a:lnSpc>
                       </a:pPr>
                       <a:r>
-                        <a:rPr sz="850" b="0">
+                        <a:rPr sz="800" b="0">
                           <a:solidFill>
                             <a:srgbClr val="565C66"/>
                           </a:solidFill>
@@ -9198,7 +9578,7 @@
                         </a:lnSpc>
                       </a:pPr>
                       <a:r>
-                        <a:rPr sz="850" b="0">
+                        <a:rPr sz="800" b="0">
                           <a:solidFill>
                             <a:srgbClr val="565C66"/>
                           </a:solidFill>
@@ -9227,7 +9607,7 @@
                         </a:lnSpc>
                       </a:pPr>
                       <a:r>
-                        <a:rPr sz="850" b="0">
+                        <a:rPr sz="800" b="0">
                           <a:solidFill>
                             <a:srgbClr val="565C66"/>
                           </a:solidFill>
@@ -9256,7 +9636,7 @@
                         </a:lnSpc>
                       </a:pPr>
                       <a:r>
-                        <a:rPr sz="850" b="0">
+                        <a:rPr sz="800" b="0">
                           <a:solidFill>
                             <a:srgbClr val="565C66"/>
                           </a:solidFill>
@@ -9264,6 +9644,64 @@
                           <a:ea typeface="Malgun Gothic"/>
                           <a:cs typeface="Malgun Gothic"/>
                         </a:rPr>
+                        <a:t>0.508</a:t>
+                      </a:r>
+                    </a:p>
+                  </a:txBody>
+                  <a:tcPr marL="82296" marR="82296" marT="41148" marB="41148" anchor="ctr">
+                    <a:solidFill>
+                      <a:srgbClr val="FFFFFF"/>
+                    </a:solidFill>
+                  </a:tcPr>
+                </a:tc>
+                <a:tc>
+                  <a:txBody>
+                    <a:bodyPr wrap="square"/>
+                    <a:lstStyle/>
+                    <a:p>
+                      <a:pPr algn="r">
+                        <a:lnSpc>
+                          <a:spcPct val="115000"/>
+                        </a:lnSpc>
+                      </a:pPr>
+                      <a:r>
+                        <a:rPr sz="800" b="1">
+                          <a:solidFill>
+                            <a:srgbClr val="2F6FCE"/>
+                          </a:solidFill>
+                          <a:latin typeface="Malgun Gothic"/>
+                          <a:ea typeface="Malgun Gothic"/>
+                          <a:cs typeface="Malgun Gothic"/>
+                        </a:rPr>
+                        <a:t>0.627 (↑)</a:t>
+                      </a:r>
+                    </a:p>
+                  </a:txBody>
+                  <a:tcPr marL="82296" marR="82296" marT="41148" marB="41148" anchor="ctr">
+                    <a:solidFill>
+                      <a:srgbClr val="FFFFFF"/>
+                    </a:solidFill>
+                  </a:tcPr>
+                </a:tc>
+                <a:tc>
+                  <a:txBody>
+                    <a:bodyPr wrap="square"/>
+                    <a:lstStyle/>
+                    <a:p>
+                      <a:pPr algn="r">
+                        <a:lnSpc>
+                          <a:spcPct val="115000"/>
+                        </a:lnSpc>
+                      </a:pPr>
+                      <a:r>
+                        <a:rPr sz="800" b="0">
+                          <a:solidFill>
+                            <a:srgbClr val="565C66"/>
+                          </a:solidFill>
+                          <a:latin typeface="Malgun Gothic"/>
+                          <a:ea typeface="Malgun Gothic"/>
+                          <a:cs typeface="Malgun Gothic"/>
+                        </a:rPr>
                         <a:t>0.085</a:t>
                       </a:r>
                     </a:p>
@@ -9285,7 +9723,7 @@
                         </a:lnSpc>
                       </a:pPr>
                       <a:r>
-                        <a:rPr sz="850" b="0">
+                        <a:rPr sz="800" b="0">
                           <a:solidFill>
                             <a:srgbClr val="565C66"/>
                           </a:solidFill>
@@ -9314,7 +9752,7 @@
                         </a:lnSpc>
                       </a:pPr>
                       <a:r>
-                        <a:rPr sz="850" b="0">
+                        <a:rPr sz="800" b="0">
                           <a:solidFill>
                             <a:srgbClr val="565C66"/>
                           </a:solidFill>
@@ -9343,7 +9781,7 @@
                         </a:lnSpc>
                       </a:pPr>
                       <a:r>
-                        <a:rPr sz="850" b="1">
+                        <a:rPr sz="800" b="1">
                           <a:solidFill>
                             <a:srgbClr val="16181D"/>
                           </a:solidFill>
@@ -9352,35 +9790,6 @@
                           <a:cs typeface="Malgun Gothic"/>
                         </a:rPr>
                         <a:t>+1 (약함)</a:t>
-                      </a:r>
-                    </a:p>
-                  </a:txBody>
-                  <a:tcPr marL="82296" marR="82296" marT="41148" marB="41148" anchor="ctr">
-                    <a:solidFill>
-                      <a:srgbClr val="FFFFFF"/>
-                    </a:solidFill>
-                  </a:tcPr>
-                </a:tc>
-                <a:tc>
-                  <a:txBody>
-                    <a:bodyPr wrap="square"/>
-                    <a:lstStyle/>
-                    <a:p>
-                      <a:pPr algn="r">
-                        <a:lnSpc>
-                          <a:spcPct val="115000"/>
-                        </a:lnSpc>
-                      </a:pPr>
-                      <a:r>
-                        <a:rPr sz="850" b="1">
-                          <a:solidFill>
-                            <a:srgbClr val="2F6FCE"/>
-                          </a:solidFill>
-                          <a:latin typeface="Malgun Gothic"/>
-                          <a:ea typeface="Malgun Gothic"/>
-                          <a:cs typeface="Malgun Gothic"/>
-                        </a:rPr>
-                        <a:t>0.627 (↑)</a:t>
                       </a:r>
                     </a:p>
                   </a:txBody>
@@ -9403,7 +9812,7 @@
                         </a:lnSpc>
                       </a:pPr>
                       <a:r>
-                        <a:rPr sz="850" b="1">
+                        <a:rPr sz="800" b="1">
                           <a:solidFill>
                             <a:srgbClr val="C1442A"/>
                           </a:solidFill>
@@ -9432,7 +9841,7 @@
                         </a:lnSpc>
                       </a:pPr>
                       <a:r>
-                        <a:rPr sz="850" b="0">
+                        <a:rPr sz="800" b="0">
                           <a:solidFill>
                             <a:srgbClr val="565C66"/>
                           </a:solidFill>
@@ -9461,7 +9870,7 @@
                         </a:lnSpc>
                       </a:pPr>
                       <a:r>
-                        <a:rPr sz="850" b="1">
+                        <a:rPr sz="800" b="1">
                           <a:solidFill>
                             <a:srgbClr val="C1442A"/>
                           </a:solidFill>
@@ -9490,7 +9899,7 @@
                         </a:lnSpc>
                       </a:pPr>
                       <a:r>
-                        <a:rPr sz="850" b="0">
+                        <a:rPr sz="800" b="0">
                           <a:solidFill>
                             <a:srgbClr val="565C66"/>
                           </a:solidFill>
@@ -9519,7 +9928,7 @@
                         </a:lnSpc>
                       </a:pPr>
                       <a:r>
-                        <a:rPr sz="850" b="0">
+                        <a:rPr sz="800" b="0">
                           <a:solidFill>
                             <a:srgbClr val="565C66"/>
                           </a:solidFill>
@@ -9542,13 +9951,71 @@
                     <a:bodyPr wrap="square"/>
                     <a:lstStyle/>
                     <a:p>
+                      <a:pPr algn="r">
+                        <a:lnSpc>
+                          <a:spcPct val="115000"/>
+                        </a:lnSpc>
+                      </a:pPr>
+                      <a:r>
+                        <a:rPr sz="800" b="0">
+                          <a:solidFill>
+                            <a:srgbClr val="565C66"/>
+                          </a:solidFill>
+                          <a:latin typeface="Malgun Gothic"/>
+                          <a:ea typeface="Malgun Gothic"/>
+                          <a:cs typeface="Malgun Gothic"/>
+                        </a:rPr>
+                        <a:t>—</a:t>
+                      </a:r>
+                    </a:p>
+                  </a:txBody>
+                  <a:tcPr marL="82296" marR="82296" marT="41148" marB="41148" anchor="ctr">
+                    <a:solidFill>
+                      <a:srgbClr val="F7F7F9"/>
+                    </a:solidFill>
+                  </a:tcPr>
+                </a:tc>
+                <a:tc>
+                  <a:txBody>
+                    <a:bodyPr wrap="square"/>
+                    <a:lstStyle/>
+                    <a:p>
+                      <a:pPr algn="r">
+                        <a:lnSpc>
+                          <a:spcPct val="115000"/>
+                        </a:lnSpc>
+                      </a:pPr>
+                      <a:r>
+                        <a:rPr sz="800" b="0">
+                          <a:solidFill>
+                            <a:srgbClr val="565C66"/>
+                          </a:solidFill>
+                          <a:latin typeface="Malgun Gothic"/>
+                          <a:ea typeface="Malgun Gothic"/>
+                          <a:cs typeface="Malgun Gothic"/>
+                        </a:rPr>
+                        <a:t>—</a:t>
+                      </a:r>
+                    </a:p>
+                  </a:txBody>
+                  <a:tcPr marL="82296" marR="82296" marT="41148" marB="41148" anchor="ctr">
+                    <a:solidFill>
+                      <a:srgbClr val="F7F7F9"/>
+                    </a:solidFill>
+                  </a:tcPr>
+                </a:tc>
+                <a:tc>
+                  <a:txBody>
+                    <a:bodyPr wrap="square"/>
+                    <a:lstStyle/>
+                    <a:p>
                       <a:pPr algn="ctr">
                         <a:lnSpc>
                           <a:spcPct val="115000"/>
                         </a:lnSpc>
                       </a:pPr>
                       <a:r>
-                        <a:rPr sz="850" b="1">
+                        <a:rPr sz="800" b="1">
                           <a:solidFill>
                             <a:srgbClr val="C1442A"/>
                           </a:solidFill>
@@ -9577,36 +10044,7 @@
                         </a:lnSpc>
                       </a:pPr>
                       <a:r>
-                        <a:rPr sz="850" b="0">
-                          <a:solidFill>
-                            <a:srgbClr val="565C66"/>
-                          </a:solidFill>
-                          <a:latin typeface="Malgun Gothic"/>
-                          <a:ea typeface="Malgun Gothic"/>
-                          <a:cs typeface="Malgun Gothic"/>
-                        </a:rPr>
-                        <a:t>—</a:t>
-                      </a:r>
-                    </a:p>
-                  </a:txBody>
-                  <a:tcPr marL="82296" marR="82296" marT="41148" marB="41148" anchor="ctr">
-                    <a:solidFill>
-                      <a:srgbClr val="F7F7F9"/>
-                    </a:solidFill>
-                  </a:tcPr>
-                </a:tc>
-                <a:tc>
-                  <a:txBody>
-                    <a:bodyPr wrap="square"/>
-                    <a:lstStyle/>
-                    <a:p>
-                      <a:pPr algn="r">
-                        <a:lnSpc>
-                          <a:spcPct val="115000"/>
-                        </a:lnSpc>
-                      </a:pPr>
-                      <a:r>
-                        <a:rPr sz="850" b="0">
+                        <a:rPr sz="800" b="0">
                           <a:solidFill>
                             <a:srgbClr val="565C66"/>
                           </a:solidFill>
@@ -9637,7 +10075,7 @@
                         </a:lnSpc>
                       </a:pPr>
                       <a:r>
-                        <a:rPr sz="850" b="1">
+                        <a:rPr sz="800" b="1">
                           <a:solidFill>
                             <a:srgbClr val="C1442A"/>
                           </a:solidFill>
@@ -9666,7 +10104,7 @@
                         </a:lnSpc>
                       </a:pPr>
                       <a:r>
-                        <a:rPr sz="850" b="0">
+                        <a:rPr sz="800" b="0">
                           <a:solidFill>
                             <a:srgbClr val="565C66"/>
                           </a:solidFill>
@@ -9695,7 +10133,7 @@
                         </a:lnSpc>
                       </a:pPr>
                       <a:r>
-                        <a:rPr sz="850" b="1">
+                        <a:rPr sz="800" b="1">
                           <a:solidFill>
                             <a:srgbClr val="C1442A"/>
                           </a:solidFill>
@@ -9724,7 +10162,7 @@
                         </a:lnSpc>
                       </a:pPr>
                       <a:r>
-                        <a:rPr sz="850" b="0">
+                        <a:rPr sz="800" b="0">
                           <a:solidFill>
                             <a:srgbClr val="565C66"/>
                           </a:solidFill>
@@ -9753,7 +10191,7 @@
                         </a:lnSpc>
                       </a:pPr>
                       <a:r>
-                        <a:rPr sz="850" b="0">
+                        <a:rPr sz="800" b="0">
                           <a:solidFill>
                             <a:srgbClr val="565C66"/>
                           </a:solidFill>
@@ -9776,13 +10214,71 @@
                     <a:bodyPr wrap="square"/>
                     <a:lstStyle/>
                     <a:p>
+                      <a:pPr algn="r">
+                        <a:lnSpc>
+                          <a:spcPct val="115000"/>
+                        </a:lnSpc>
+                      </a:pPr>
+                      <a:r>
+                        <a:rPr sz="800" b="0">
+                          <a:solidFill>
+                            <a:srgbClr val="565C66"/>
+                          </a:solidFill>
+                          <a:latin typeface="Malgun Gothic"/>
+                          <a:ea typeface="Malgun Gothic"/>
+                          <a:cs typeface="Malgun Gothic"/>
+                        </a:rPr>
+                        <a:t>—</a:t>
+                      </a:r>
+                    </a:p>
+                  </a:txBody>
+                  <a:tcPr marL="82296" marR="82296" marT="41148" marB="41148" anchor="ctr">
+                    <a:solidFill>
+                      <a:srgbClr val="FFFFFF"/>
+                    </a:solidFill>
+                  </a:tcPr>
+                </a:tc>
+                <a:tc>
+                  <a:txBody>
+                    <a:bodyPr wrap="square"/>
+                    <a:lstStyle/>
+                    <a:p>
+                      <a:pPr algn="r">
+                        <a:lnSpc>
+                          <a:spcPct val="115000"/>
+                        </a:lnSpc>
+                      </a:pPr>
+                      <a:r>
+                        <a:rPr sz="800" b="0">
+                          <a:solidFill>
+                            <a:srgbClr val="565C66"/>
+                          </a:solidFill>
+                          <a:latin typeface="Malgun Gothic"/>
+                          <a:ea typeface="Malgun Gothic"/>
+                          <a:cs typeface="Malgun Gothic"/>
+                        </a:rPr>
+                        <a:t>—</a:t>
+                      </a:r>
+                    </a:p>
+                  </a:txBody>
+                  <a:tcPr marL="82296" marR="82296" marT="41148" marB="41148" anchor="ctr">
+                    <a:solidFill>
+                      <a:srgbClr val="FFFFFF"/>
+                    </a:solidFill>
+                  </a:tcPr>
+                </a:tc>
+                <a:tc>
+                  <a:txBody>
+                    <a:bodyPr wrap="square"/>
+                    <a:lstStyle/>
+                    <a:p>
                       <a:pPr algn="ctr">
                         <a:lnSpc>
                           <a:spcPct val="115000"/>
                         </a:lnSpc>
                       </a:pPr>
                       <a:r>
-                        <a:rPr sz="850" b="1">
+                        <a:rPr sz="800" b="1">
                           <a:solidFill>
                             <a:srgbClr val="C1442A"/>
                           </a:solidFill>
@@ -9811,36 +10307,7 @@
                         </a:lnSpc>
                       </a:pPr>
                       <a:r>
-                        <a:rPr sz="850" b="0">
-                          <a:solidFill>
-                            <a:srgbClr val="565C66"/>
-                          </a:solidFill>
-                          <a:latin typeface="Malgun Gothic"/>
-                          <a:ea typeface="Malgun Gothic"/>
-                          <a:cs typeface="Malgun Gothic"/>
-                        </a:rPr>
-                        <a:t>—</a:t>
-                      </a:r>
-                    </a:p>
-                  </a:txBody>
-                  <a:tcPr marL="82296" marR="82296" marT="41148" marB="41148" anchor="ctr">
-                    <a:solidFill>
-                      <a:srgbClr val="FFFFFF"/>
-                    </a:solidFill>
-                  </a:tcPr>
-                </a:tc>
-                <a:tc>
-                  <a:txBody>
-                    <a:bodyPr wrap="square"/>
-                    <a:lstStyle/>
-                    <a:p>
-                      <a:pPr algn="r">
-                        <a:lnSpc>
-                          <a:spcPct val="115000"/>
-                        </a:lnSpc>
-                      </a:pPr>
-                      <a:r>
-                        <a:rPr sz="850" b="0">
+                        <a:rPr sz="800" b="0">
                           <a:solidFill>
                             <a:srgbClr val="565C66"/>
                           </a:solidFill>
@@ -11819,7 +12286,7 @@
         </p:nvGraphicFramePr>
         <p:xfrm>
           <a:off x="640080" y="2011680"/>
-          <a:ext cx="10908792" cy="2340864"/>
+          <a:ext cx="10908786" cy="2340864"/>
         </p:xfrm>
         <a:graphic>
           <a:graphicData uri="http://schemas.openxmlformats.org/drawingml/2006/table">
@@ -11828,14 +12295,15 @@
                 <a:tableStyleId>{5C22544A-7EE6-4342-B048-85BDC9FD1C3A}</a:tableStyleId>
               </a:tblPr>
               <a:tblGrid>
-                <a:gridCol w="1417320"/>
-                <a:gridCol w="1691640"/>
-                <a:gridCol w="960120"/>
-                <a:gridCol w="1005840"/>
-                <a:gridCol w="1005840"/>
-                <a:gridCol w="1600200"/>
-                <a:gridCol w="1600200"/>
-                <a:gridCol w="1627632"/>
+                <a:gridCol w="1332748"/>
+                <a:gridCol w="1579553"/>
+                <a:gridCol w="888498"/>
+                <a:gridCol w="937859"/>
+                <a:gridCol w="1135304"/>
+                <a:gridCol w="937859"/>
+                <a:gridCol w="937859"/>
+                <a:gridCol w="1628914"/>
+                <a:gridCol w="1530192"/>
               </a:tblGrid>
               <a:tr h="329184">
                 <a:tc>
@@ -11849,7 +12317,7 @@
                         </a:lnSpc>
                       </a:pPr>
                       <a:r>
-                        <a:rPr sz="850" b="1">
+                        <a:rPr sz="800" b="1">
                           <a:solidFill>
                             <a:srgbClr val="8B9099"/>
                           </a:solidFill>
@@ -11878,7 +12346,7 @@
                         </a:lnSpc>
                       </a:pPr>
                       <a:r>
-                        <a:rPr sz="850" b="1">
+                        <a:rPr sz="800" b="1">
                           <a:solidFill>
                             <a:srgbClr val="8B9099"/>
                           </a:solidFill>
@@ -11907,7 +12375,7 @@
                         </a:lnSpc>
                       </a:pPr>
                       <a:r>
-                        <a:rPr sz="850" b="1">
+                        <a:rPr sz="800" b="1">
                           <a:solidFill>
                             <a:srgbClr val="8B9099"/>
                           </a:solidFill>
@@ -11936,7 +12404,7 @@
                         </a:lnSpc>
                       </a:pPr>
                       <a:r>
-                        <a:rPr sz="850" b="1">
+                        <a:rPr sz="800" b="1">
                           <a:solidFill>
                             <a:srgbClr val="8B9099"/>
                           </a:solidFill>
@@ -11944,6 +12412,64 @@
                           <a:ea typeface="Malgun Gothic"/>
                           <a:cs typeface="Malgun Gothic"/>
                         </a:rPr>
+                        <a:t>k0 util</a:t>
+                      </a:r>
+                    </a:p>
+                  </a:txBody>
+                  <a:tcPr marL="82296" marR="82296" marT="41148" marB="41148" anchor="ctr">
+                    <a:solidFill>
+                      <a:srgbClr val="E9EAED"/>
+                    </a:solidFill>
+                  </a:tcPr>
+                </a:tc>
+                <a:tc>
+                  <a:txBody>
+                    <a:bodyPr wrap="square"/>
+                    <a:lstStyle/>
+                    <a:p>
+                      <a:pPr algn="r">
+                        <a:lnSpc>
+                          <a:spcPct val="100000"/>
+                        </a:lnSpc>
+                      </a:pPr>
+                      <a:r>
+                        <a:rPr sz="800" b="1">
+                          <a:solidFill>
+                            <a:srgbClr val="8B9099"/>
+                          </a:solidFill>
+                          <a:latin typeface="Malgun Gothic"/>
+                          <a:ea typeface="Malgun Gothic"/>
+                          <a:cs typeface="Malgun Gothic"/>
+                        </a:rPr>
+                        <a:t>kN util</a:t>
+                      </a:r>
+                    </a:p>
+                  </a:txBody>
+                  <a:tcPr marL="82296" marR="82296" marT="41148" marB="41148" anchor="ctr">
+                    <a:solidFill>
+                      <a:srgbClr val="E9EAED"/>
+                    </a:solidFill>
+                  </a:tcPr>
+                </a:tc>
+                <a:tc>
+                  <a:txBody>
+                    <a:bodyPr wrap="square"/>
+                    <a:lstStyle/>
+                    <a:p>
+                      <a:pPr algn="r">
+                        <a:lnSpc>
+                          <a:spcPct val="100000"/>
+                        </a:lnSpc>
+                      </a:pPr>
+                      <a:r>
+                        <a:rPr sz="800" b="1">
+                          <a:solidFill>
+                            <a:srgbClr val="8B9099"/>
+                          </a:solidFill>
+                          <a:latin typeface="Malgun Gothic"/>
+                          <a:ea typeface="Malgun Gothic"/>
+                          <a:cs typeface="Malgun Gothic"/>
+                        </a:rPr>
                         <a:t>k0 sec</a:t>
                       </a:r>
                     </a:p>
@@ -11965,7 +12491,7 @@
                         </a:lnSpc>
                       </a:pPr>
                       <a:r>
-                        <a:rPr sz="850" b="1">
+                        <a:rPr sz="800" b="1">
                           <a:solidFill>
                             <a:srgbClr val="8B9099"/>
                           </a:solidFill>
@@ -11994,7 +12520,7 @@
                         </a:lnSpc>
                       </a:pPr>
                       <a:r>
-                        <a:rPr sz="850" b="1">
+                        <a:rPr sz="800" b="1">
                           <a:solidFill>
                             <a:srgbClr val="8B9099"/>
                           </a:solidFill>
@@ -12023,7 +12549,7 @@
                         </a:lnSpc>
                       </a:pPr>
                       <a:r>
-                        <a:rPr sz="850" b="1">
+                        <a:rPr sz="800" b="1">
                           <a:solidFill>
                             <a:srgbClr val="8B9099"/>
                           </a:solidFill>
@@ -12031,36 +12557,7 @@
                           <a:ea typeface="Malgun Gothic"/>
                           <a:cs typeface="Malgun Gothic"/>
                         </a:rPr>
-                        <a:t>net</a:t>
-                      </a:r>
-                    </a:p>
-                  </a:txBody>
-                  <a:tcPr marL="82296" marR="82296" marT="41148" marB="41148" anchor="ctr">
-                    <a:solidFill>
-                      <a:srgbClr val="E9EAED"/>
-                    </a:solidFill>
-                  </a:tcPr>
-                </a:tc>
-                <a:tc>
-                  <a:txBody>
-                    <a:bodyPr wrap="square"/>
-                    <a:lstStyle/>
-                    <a:p>
-                      <a:pPr algn="r">
-                        <a:lnSpc>
-                          <a:spcPct val="100000"/>
-                        </a:lnSpc>
-                      </a:pPr>
-                      <a:r>
-                        <a:rPr sz="850" b="1">
-                          <a:solidFill>
-                            <a:srgbClr val="8B9099"/>
-                          </a:solidFill>
-                          <a:latin typeface="Malgun Gothic"/>
-                          <a:ea typeface="Malgun Gothic"/>
-                          <a:cs typeface="Malgun Gothic"/>
-                        </a:rPr>
-                        <a:t>kN util</a:t>
+                        <a:t>순억제</a:t>
                       </a:r>
                     </a:p>
                   </a:txBody>
@@ -12083,7 +12580,7 @@
                         </a:lnSpc>
                       </a:pPr>
                       <a:r>
-                        <a:rPr sz="850" b="0">
+                        <a:rPr sz="800" b="0">
                           <a:solidFill>
                             <a:srgbClr val="565C66"/>
                           </a:solidFill>
@@ -12112,7 +12609,7 @@
                         </a:lnSpc>
                       </a:pPr>
                       <a:r>
-                        <a:rPr sz="850" b="0">
+                        <a:rPr sz="800" b="0">
                           <a:solidFill>
                             <a:srgbClr val="565C66"/>
                           </a:solidFill>
@@ -12141,7 +12638,7 @@
                         </a:lnSpc>
                       </a:pPr>
                       <a:r>
-                        <a:rPr sz="850" b="0">
+                        <a:rPr sz="800" b="0">
                           <a:solidFill>
                             <a:srgbClr val="565C66"/>
                           </a:solidFill>
@@ -12170,7 +12667,7 @@
                         </a:lnSpc>
                       </a:pPr>
                       <a:r>
-                        <a:rPr sz="850" b="0">
+                        <a:rPr sz="800" b="0">
                           <a:solidFill>
                             <a:srgbClr val="565C66"/>
                           </a:solidFill>
@@ -12178,6 +12675,64 @@
                           <a:ea typeface="Malgun Gothic"/>
                           <a:cs typeface="Malgun Gothic"/>
                         </a:rPr>
+                        <a:t>0.314</a:t>
+                      </a:r>
+                    </a:p>
+                  </a:txBody>
+                  <a:tcPr marL="82296" marR="82296" marT="41148" marB="41148" anchor="ctr">
+                    <a:solidFill>
+                      <a:srgbClr val="FFFFFF"/>
+                    </a:solidFill>
+                  </a:tcPr>
+                </a:tc>
+                <a:tc>
+                  <a:txBody>
+                    <a:bodyPr wrap="square"/>
+                    <a:lstStyle/>
+                    <a:p>
+                      <a:pPr algn="r">
+                        <a:lnSpc>
+                          <a:spcPct val="115000"/>
+                        </a:lnSpc>
+                      </a:pPr>
+                      <a:r>
+                        <a:rPr sz="800" b="1">
+                          <a:solidFill>
+                            <a:srgbClr val="2F6FCE"/>
+                          </a:solidFill>
+                          <a:latin typeface="Malgun Gothic"/>
+                          <a:ea typeface="Malgun Gothic"/>
+                          <a:cs typeface="Malgun Gothic"/>
+                        </a:rPr>
+                        <a:t>0.429 (↑)</a:t>
+                      </a:r>
+                    </a:p>
+                  </a:txBody>
+                  <a:tcPr marL="82296" marR="82296" marT="41148" marB="41148" anchor="ctr">
+                    <a:solidFill>
+                      <a:srgbClr val="FFFFFF"/>
+                    </a:solidFill>
+                  </a:tcPr>
+                </a:tc>
+                <a:tc>
+                  <a:txBody>
+                    <a:bodyPr wrap="square"/>
+                    <a:lstStyle/>
+                    <a:p>
+                      <a:pPr algn="r">
+                        <a:lnSpc>
+                          <a:spcPct val="115000"/>
+                        </a:lnSpc>
+                      </a:pPr>
+                      <a:r>
+                        <a:rPr sz="800" b="0">
+                          <a:solidFill>
+                            <a:srgbClr val="565C66"/>
+                          </a:solidFill>
+                          <a:latin typeface="Malgun Gothic"/>
+                          <a:ea typeface="Malgun Gothic"/>
+                          <a:cs typeface="Malgun Gothic"/>
+                        </a:rPr>
                         <a:t>0.229</a:t>
                       </a:r>
                     </a:p>
@@ -12199,7 +12754,7 @@
                         </a:lnSpc>
                       </a:pPr>
                       <a:r>
-                        <a:rPr sz="850" b="1">
+                        <a:rPr sz="800" b="1">
                           <a:solidFill>
                             <a:srgbClr val="2F6FCE"/>
                           </a:solidFill>
@@ -12228,7 +12783,7 @@
                         </a:lnSpc>
                       </a:pPr>
                       <a:r>
-                        <a:rPr sz="850" b="0">
+                        <a:rPr sz="800" b="0">
                           <a:solidFill>
                             <a:srgbClr val="565C66"/>
                           </a:solidFill>
@@ -12257,7 +12812,7 @@
                         </a:lnSpc>
                       </a:pPr>
                       <a:r>
-                        <a:rPr sz="850" b="1">
+                        <a:rPr sz="800" b="1">
                           <a:solidFill>
                             <a:srgbClr val="2F6FCE"/>
                           </a:solidFill>
@@ -12266,35 +12821,6 @@
                           <a:cs typeface="Malgun Gothic"/>
                         </a:rPr>
                         <a:t>+8 전량억제</a:t>
-                      </a:r>
-                    </a:p>
-                  </a:txBody>
-                  <a:tcPr marL="82296" marR="82296" marT="41148" marB="41148" anchor="ctr">
-                    <a:solidFill>
-                      <a:srgbClr val="FFFFFF"/>
-                    </a:solidFill>
-                  </a:tcPr>
-                </a:tc>
-                <a:tc>
-                  <a:txBody>
-                    <a:bodyPr wrap="square"/>
-                    <a:lstStyle/>
-                    <a:p>
-                      <a:pPr algn="r">
-                        <a:lnSpc>
-                          <a:spcPct val="115000"/>
-                        </a:lnSpc>
-                      </a:pPr>
-                      <a:r>
-                        <a:rPr sz="850" b="1">
-                          <a:solidFill>
-                            <a:srgbClr val="2F6FCE"/>
-                          </a:solidFill>
-                          <a:latin typeface="Malgun Gothic"/>
-                          <a:ea typeface="Malgun Gothic"/>
-                          <a:cs typeface="Malgun Gothic"/>
-                        </a:rPr>
-                        <a:t>0.429 (↑)</a:t>
                       </a:r>
                     </a:p>
                   </a:txBody>
@@ -12317,7 +12843,7 @@
                         </a:lnSpc>
                       </a:pPr>
                       <a:r>
-                        <a:rPr sz="850" b="0">
+                        <a:rPr sz="800" b="0">
                           <a:solidFill>
                             <a:srgbClr val="565C66"/>
                           </a:solidFill>
@@ -12346,7 +12872,7 @@
                         </a:lnSpc>
                       </a:pPr>
                       <a:r>
-                        <a:rPr sz="850" b="0">
+                        <a:rPr sz="800" b="0">
                           <a:solidFill>
                             <a:srgbClr val="565C66"/>
                           </a:solidFill>
@@ -12375,7 +12901,7 @@
                         </a:lnSpc>
                       </a:pPr>
                       <a:r>
-                        <a:rPr sz="850" b="0">
+                        <a:rPr sz="800" b="0">
                           <a:solidFill>
                             <a:srgbClr val="565C66"/>
                           </a:solidFill>
@@ -12404,7 +12930,7 @@
                         </a:lnSpc>
                       </a:pPr>
                       <a:r>
-                        <a:rPr sz="850" b="0">
+                        <a:rPr sz="800" b="0">
                           <a:solidFill>
                             <a:srgbClr val="565C66"/>
                           </a:solidFill>
@@ -12412,6 +12938,64 @@
                           <a:ea typeface="Malgun Gothic"/>
                           <a:cs typeface="Malgun Gothic"/>
                         </a:rPr>
+                        <a:t>0.400</a:t>
+                      </a:r>
+                    </a:p>
+                  </a:txBody>
+                  <a:tcPr marL="82296" marR="82296" marT="41148" marB="41148" anchor="ctr">
+                    <a:solidFill>
+                      <a:srgbClr val="F7F7F9"/>
+                    </a:solidFill>
+                  </a:tcPr>
+                </a:tc>
+                <a:tc>
+                  <a:txBody>
+                    <a:bodyPr wrap="square"/>
+                    <a:lstStyle/>
+                    <a:p>
+                      <a:pPr algn="r">
+                        <a:lnSpc>
+                          <a:spcPct val="115000"/>
+                        </a:lnSpc>
+                      </a:pPr>
+                      <a:r>
+                        <a:rPr sz="800" b="0">
+                          <a:solidFill>
+                            <a:srgbClr val="565C66"/>
+                          </a:solidFill>
+                          <a:latin typeface="Malgun Gothic"/>
+                          <a:ea typeface="Malgun Gothic"/>
+                          <a:cs typeface="Malgun Gothic"/>
+                        </a:rPr>
+                        <a:t>0.400 무손상</a:t>
+                      </a:r>
+                    </a:p>
+                  </a:txBody>
+                  <a:tcPr marL="82296" marR="82296" marT="41148" marB="41148" anchor="ctr">
+                    <a:solidFill>
+                      <a:srgbClr val="F7F7F9"/>
+                    </a:solidFill>
+                  </a:tcPr>
+                </a:tc>
+                <a:tc>
+                  <a:txBody>
+                    <a:bodyPr wrap="square"/>
+                    <a:lstStyle/>
+                    <a:p>
+                      <a:pPr algn="r">
+                        <a:lnSpc>
+                          <a:spcPct val="115000"/>
+                        </a:lnSpc>
+                      </a:pPr>
+                      <a:r>
+                        <a:rPr sz="800" b="0">
+                          <a:solidFill>
+                            <a:srgbClr val="565C66"/>
+                          </a:solidFill>
+                          <a:latin typeface="Malgun Gothic"/>
+                          <a:ea typeface="Malgun Gothic"/>
+                          <a:cs typeface="Malgun Gothic"/>
+                        </a:rPr>
                         <a:t>0.171</a:t>
                       </a:r>
                     </a:p>
@@ -12433,7 +13017,7 @@
                         </a:lnSpc>
                       </a:pPr>
                       <a:r>
-                        <a:rPr sz="850" b="1">
+                        <a:rPr sz="800" b="1">
                           <a:solidFill>
                             <a:srgbClr val="16181D"/>
                           </a:solidFill>
@@ -12462,7 +13046,7 @@
                         </a:lnSpc>
                       </a:pPr>
                       <a:r>
-                        <a:rPr sz="850" b="0">
+                        <a:rPr sz="800" b="0">
                           <a:solidFill>
                             <a:srgbClr val="565C66"/>
                           </a:solidFill>
@@ -12491,7 +13075,7 @@
                         </a:lnSpc>
                       </a:pPr>
                       <a:r>
-                        <a:rPr sz="850" b="1">
+                        <a:rPr sz="800" b="1">
                           <a:solidFill>
                             <a:srgbClr val="2F6FCE"/>
                           </a:solidFill>
@@ -12500,35 +13084,6 @@
                           <a:cs typeface="Malgun Gothic"/>
                         </a:rPr>
                         <a:t>+4 (66%↓)</a:t>
-                      </a:r>
-                    </a:p>
-                  </a:txBody>
-                  <a:tcPr marL="82296" marR="82296" marT="41148" marB="41148" anchor="ctr">
-                    <a:solidFill>
-                      <a:srgbClr val="F7F7F9"/>
-                    </a:solidFill>
-                  </a:tcPr>
-                </a:tc>
-                <a:tc>
-                  <a:txBody>
-                    <a:bodyPr wrap="square"/>
-                    <a:lstStyle/>
-                    <a:p>
-                      <a:pPr algn="r">
-                        <a:lnSpc>
-                          <a:spcPct val="115000"/>
-                        </a:lnSpc>
-                      </a:pPr>
-                      <a:r>
-                        <a:rPr sz="850" b="1">
-                          <a:solidFill>
-                            <a:srgbClr val="16181D"/>
-                          </a:solidFill>
-                          <a:latin typeface="Malgun Gothic"/>
-                          <a:ea typeface="Malgun Gothic"/>
-                          <a:cs typeface="Malgun Gothic"/>
-                        </a:rPr>
-                        <a:t>0.400 무손상</a:t>
                       </a:r>
                     </a:p>
                   </a:txBody>
@@ -12551,7 +13106,7 @@
                         </a:lnSpc>
                       </a:pPr>
                       <a:r>
-                        <a:rPr sz="850" b="0">
+                        <a:rPr sz="800" b="0">
                           <a:solidFill>
                             <a:srgbClr val="565C66"/>
                           </a:solidFill>
@@ -12580,7 +13135,7 @@
                         </a:lnSpc>
                       </a:pPr>
                       <a:r>
-                        <a:rPr sz="850" b="0">
+                        <a:rPr sz="800" b="0">
                           <a:solidFill>
                             <a:srgbClr val="565C66"/>
                           </a:solidFill>
@@ -12609,7 +13164,7 @@
                         </a:lnSpc>
                       </a:pPr>
                       <a:r>
-                        <a:rPr sz="850" b="0">
+                        <a:rPr sz="800" b="0">
                           <a:solidFill>
                             <a:srgbClr val="565C66"/>
                           </a:solidFill>
@@ -12638,7 +13193,7 @@
                         </a:lnSpc>
                       </a:pPr>
                       <a:r>
-                        <a:rPr sz="850" b="0">
+                        <a:rPr sz="800" b="0">
                           <a:solidFill>
                             <a:srgbClr val="565C66"/>
                           </a:solidFill>
@@ -12646,6 +13201,64 @@
                           <a:ea typeface="Malgun Gothic"/>
                           <a:cs typeface="Malgun Gothic"/>
                         </a:rPr>
+                        <a:t>0.690</a:t>
+                      </a:r>
+                    </a:p>
+                  </a:txBody>
+                  <a:tcPr marL="82296" marR="82296" marT="41148" marB="41148" anchor="ctr">
+                    <a:solidFill>
+                      <a:srgbClr val="FFFFFF"/>
+                    </a:solidFill>
+                  </a:tcPr>
+                </a:tc>
+                <a:tc>
+                  <a:txBody>
+                    <a:bodyPr wrap="square"/>
+                    <a:lstStyle/>
+                    <a:p>
+                      <a:pPr algn="r">
+                        <a:lnSpc>
+                          <a:spcPct val="115000"/>
+                        </a:lnSpc>
+                      </a:pPr>
+                      <a:r>
+                        <a:rPr sz="800" b="0">
+                          <a:solidFill>
+                            <a:srgbClr val="565C66"/>
+                          </a:solidFill>
+                          <a:latin typeface="Malgun Gothic"/>
+                          <a:ea typeface="Malgun Gothic"/>
+                          <a:cs typeface="Malgun Gothic"/>
+                        </a:rPr>
+                        <a:t>0.667 (↓)</a:t>
+                      </a:r>
+                    </a:p>
+                  </a:txBody>
+                  <a:tcPr marL="82296" marR="82296" marT="41148" marB="41148" anchor="ctr">
+                    <a:solidFill>
+                      <a:srgbClr val="FFFFFF"/>
+                    </a:solidFill>
+                  </a:tcPr>
+                </a:tc>
+                <a:tc>
+                  <a:txBody>
+                    <a:bodyPr wrap="square"/>
+                    <a:lstStyle/>
+                    <a:p>
+                      <a:pPr algn="r">
+                        <a:lnSpc>
+                          <a:spcPct val="115000"/>
+                        </a:lnSpc>
+                      </a:pPr>
+                      <a:r>
+                        <a:rPr sz="800" b="0">
+                          <a:solidFill>
+                            <a:srgbClr val="565C66"/>
+                          </a:solidFill>
+                          <a:latin typeface="Malgun Gothic"/>
+                          <a:ea typeface="Malgun Gothic"/>
+                          <a:cs typeface="Malgun Gothic"/>
+                        </a:rPr>
                         <a:t>0.095</a:t>
                       </a:r>
                     </a:p>
@@ -12667,7 +13280,7 @@
                         </a:lnSpc>
                       </a:pPr>
                       <a:r>
-                        <a:rPr sz="850" b="1">
+                        <a:rPr sz="800" b="1">
                           <a:solidFill>
                             <a:srgbClr val="2F6FCE"/>
                           </a:solidFill>
@@ -12696,7 +13309,7 @@
                         </a:lnSpc>
                       </a:pPr>
                       <a:r>
-                        <a:rPr sz="850" b="0">
+                        <a:rPr sz="800" b="0">
                           <a:solidFill>
                             <a:srgbClr val="565C66"/>
                           </a:solidFill>
@@ -12725,7 +13338,7 @@
                         </a:lnSpc>
                       </a:pPr>
                       <a:r>
-                        <a:rPr sz="850" b="1">
+                        <a:rPr sz="800" b="1">
                           <a:solidFill>
                             <a:srgbClr val="2F6FCE"/>
                           </a:solidFill>
@@ -12734,35 +13347,6 @@
                           <a:cs typeface="Malgun Gothic"/>
                         </a:rPr>
                         <a:t>+4 전량억제</a:t>
-                      </a:r>
-                    </a:p>
-                  </a:txBody>
-                  <a:tcPr marL="82296" marR="82296" marT="41148" marB="41148" anchor="ctr">
-                    <a:solidFill>
-                      <a:srgbClr val="FFFFFF"/>
-                    </a:solidFill>
-                  </a:tcPr>
-                </a:tc>
-                <a:tc>
-                  <a:txBody>
-                    <a:bodyPr wrap="square"/>
-                    <a:lstStyle/>
-                    <a:p>
-                      <a:pPr algn="r">
-                        <a:lnSpc>
-                          <a:spcPct val="115000"/>
-                        </a:lnSpc>
-                      </a:pPr>
-                      <a:r>
-                        <a:rPr sz="850" b="0">
-                          <a:solidFill>
-                            <a:srgbClr val="565C66"/>
-                          </a:solidFill>
-                          <a:latin typeface="Malgun Gothic"/>
-                          <a:ea typeface="Malgun Gothic"/>
-                          <a:cs typeface="Malgun Gothic"/>
-                        </a:rPr>
-                        <a:t>0.667 (↓)</a:t>
                       </a:r>
                     </a:p>
                   </a:txBody>
@@ -12785,7 +13369,7 @@
                         </a:lnSpc>
                       </a:pPr>
                       <a:r>
-                        <a:rPr sz="850" b="0">
+                        <a:rPr sz="800" b="0">
                           <a:solidFill>
                             <a:srgbClr val="565C66"/>
                           </a:solidFill>
@@ -12814,7 +13398,7 @@
                         </a:lnSpc>
                       </a:pPr>
                       <a:r>
-                        <a:rPr sz="850" b="0">
+                        <a:rPr sz="800" b="0">
                           <a:solidFill>
                             <a:srgbClr val="565C66"/>
                           </a:solidFill>
@@ -12843,7 +13427,7 @@
                         </a:lnSpc>
                       </a:pPr>
                       <a:r>
-                        <a:rPr sz="850" b="0">
+                        <a:rPr sz="800" b="0">
                           <a:solidFill>
                             <a:srgbClr val="565C66"/>
                           </a:solidFill>
@@ -12872,7 +13456,7 @@
                         </a:lnSpc>
                       </a:pPr>
                       <a:r>
-                        <a:rPr sz="850" b="0">
+                        <a:rPr sz="800" b="0">
                           <a:solidFill>
                             <a:srgbClr val="565C66"/>
                           </a:solidFill>
@@ -12880,6 +13464,64 @@
                           <a:ea typeface="Malgun Gothic"/>
                           <a:cs typeface="Malgun Gothic"/>
                         </a:rPr>
+                        <a:t>0.189</a:t>
+                      </a:r>
+                    </a:p>
+                  </a:txBody>
+                  <a:tcPr marL="82296" marR="82296" marT="41148" marB="41148" anchor="ctr">
+                    <a:solidFill>
+                      <a:srgbClr val="F7F7F9"/>
+                    </a:solidFill>
+                  </a:tcPr>
+                </a:tc>
+                <a:tc>
+                  <a:txBody>
+                    <a:bodyPr wrap="square"/>
+                    <a:lstStyle/>
+                    <a:p>
+                      <a:pPr algn="r">
+                        <a:lnSpc>
+                          <a:spcPct val="115000"/>
+                        </a:lnSpc>
+                      </a:pPr>
+                      <a:r>
+                        <a:rPr sz="800" b="0">
+                          <a:solidFill>
+                            <a:srgbClr val="565C66"/>
+                          </a:solidFill>
+                          <a:latin typeface="Malgun Gothic"/>
+                          <a:ea typeface="Malgun Gothic"/>
+                          <a:cs typeface="Malgun Gothic"/>
+                        </a:rPr>
+                        <a:t>0.189 무변화</a:t>
+                      </a:r>
+                    </a:p>
+                  </a:txBody>
+                  <a:tcPr marL="82296" marR="82296" marT="41148" marB="41148" anchor="ctr">
+                    <a:solidFill>
+                      <a:srgbClr val="F7F7F9"/>
+                    </a:solidFill>
+                  </a:tcPr>
+                </a:tc>
+                <a:tc>
+                  <a:txBody>
+                    <a:bodyPr wrap="square"/>
+                    <a:lstStyle/>
+                    <a:p>
+                      <a:pPr algn="r">
+                        <a:lnSpc>
+                          <a:spcPct val="115000"/>
+                        </a:lnSpc>
+                      </a:pPr>
+                      <a:r>
+                        <a:rPr sz="800" b="0">
+                          <a:solidFill>
+                            <a:srgbClr val="565C66"/>
+                          </a:solidFill>
+                          <a:latin typeface="Malgun Gothic"/>
+                          <a:ea typeface="Malgun Gothic"/>
+                          <a:cs typeface="Malgun Gothic"/>
+                        </a:rPr>
                         <a:t>0.000</a:t>
                       </a:r>
                     </a:p>
@@ -12901,7 +13543,7 @@
                         </a:lnSpc>
                       </a:pPr>
                       <a:r>
-                        <a:rPr sz="850" b="0">
+                        <a:rPr sz="800" b="0">
                           <a:solidFill>
                             <a:srgbClr val="565C66"/>
                           </a:solidFill>
@@ -12930,7 +13572,7 @@
                         </a:lnSpc>
                       </a:pPr>
                       <a:r>
-                        <a:rPr sz="850" b="1">
+                        <a:rPr sz="800" b="1">
                           <a:solidFill>
                             <a:srgbClr val="16181D"/>
                           </a:solidFill>
@@ -12959,7 +13601,7 @@
                         </a:lnSpc>
                       </a:pPr>
                       <a:r>
-                        <a:rPr sz="850" b="0">
+                        <a:rPr sz="800" b="0">
                           <a:solidFill>
                             <a:srgbClr val="565C66"/>
                           </a:solidFill>
@@ -12968,35 +13610,6 @@
                           <a:cs typeface="Malgun Gothic"/>
                         </a:rPr>
                         <a:t>0</a:t>
-                      </a:r>
-                    </a:p>
-                  </a:txBody>
-                  <a:tcPr marL="82296" marR="82296" marT="41148" marB="41148" anchor="ctr">
-                    <a:solidFill>
-                      <a:srgbClr val="F7F7F9"/>
-                    </a:solidFill>
-                  </a:tcPr>
-                </a:tc>
-                <a:tc>
-                  <a:txBody>
-                    <a:bodyPr wrap="square"/>
-                    <a:lstStyle/>
-                    <a:p>
-                      <a:pPr algn="r">
-                        <a:lnSpc>
-                          <a:spcPct val="115000"/>
-                        </a:lnSpc>
-                      </a:pPr>
-                      <a:r>
-                        <a:rPr sz="850" b="0">
-                          <a:solidFill>
-                            <a:srgbClr val="565C66"/>
-                          </a:solidFill>
-                          <a:latin typeface="Malgun Gothic"/>
-                          <a:ea typeface="Malgun Gothic"/>
-                          <a:cs typeface="Malgun Gothic"/>
-                        </a:rPr>
-                        <a:t>0.189 무변화</a:t>
                       </a:r>
                     </a:p>
                   </a:txBody>
@@ -13019,7 +13632,7 @@
                         </a:lnSpc>
                       </a:pPr>
                       <a:r>
-                        <a:rPr sz="850" b="0">
+                        <a:rPr sz="800" b="0">
                           <a:solidFill>
                             <a:srgbClr val="565C66"/>
                           </a:solidFill>
@@ -13048,7 +13661,7 @@
                         </a:lnSpc>
                       </a:pPr>
                       <a:r>
-                        <a:rPr sz="850" b="0">
+                        <a:rPr sz="800" b="0">
                           <a:solidFill>
                             <a:srgbClr val="565C66"/>
                           </a:solidFill>
@@ -13077,7 +13690,7 @@
                         </a:lnSpc>
                       </a:pPr>
                       <a:r>
-                        <a:rPr sz="850" b="0">
+                        <a:rPr sz="800" b="0">
                           <a:solidFill>
                             <a:srgbClr val="565C66"/>
                           </a:solidFill>
@@ -13106,7 +13719,7 @@
                         </a:lnSpc>
                       </a:pPr>
                       <a:r>
-                        <a:rPr sz="850" b="0">
+                        <a:rPr sz="800" b="0">
                           <a:solidFill>
                             <a:srgbClr val="565C66"/>
                           </a:solidFill>
@@ -13114,6 +13727,64 @@
                           <a:ea typeface="Malgun Gothic"/>
                           <a:cs typeface="Malgun Gothic"/>
                         </a:rPr>
+                        <a:t>0.096</a:t>
+                      </a:r>
+                    </a:p>
+                  </a:txBody>
+                  <a:tcPr marL="82296" marR="82296" marT="41148" marB="41148" anchor="ctr">
+                    <a:solidFill>
+                      <a:srgbClr val="FFFFFF"/>
+                    </a:solidFill>
+                  </a:tcPr>
+                </a:tc>
+                <a:tc>
+                  <a:txBody>
+                    <a:bodyPr wrap="square"/>
+                    <a:lstStyle/>
+                    <a:p>
+                      <a:pPr algn="r">
+                        <a:lnSpc>
+                          <a:spcPct val="115000"/>
+                        </a:lnSpc>
+                      </a:pPr>
+                      <a:r>
+                        <a:rPr sz="800" b="1">
+                          <a:solidFill>
+                            <a:srgbClr val="C1442A"/>
+                          </a:solidFill>
+                          <a:latin typeface="Malgun Gothic"/>
+                          <a:ea typeface="Malgun Gothic"/>
+                          <a:cs typeface="Malgun Gothic"/>
+                        </a:rPr>
+                        <a:t>0.096 (P14)</a:t>
+                      </a:r>
+                    </a:p>
+                  </a:txBody>
+                  <a:tcPr marL="82296" marR="82296" marT="41148" marB="41148" anchor="ctr">
+                    <a:solidFill>
+                      <a:srgbClr val="FFFFFF"/>
+                    </a:solidFill>
+                  </a:tcPr>
+                </a:tc>
+                <a:tc>
+                  <a:txBody>
+                    <a:bodyPr wrap="square"/>
+                    <a:lstStyle/>
+                    <a:p>
+                      <a:pPr algn="r">
+                        <a:lnSpc>
+                          <a:spcPct val="115000"/>
+                        </a:lnSpc>
+                      </a:pPr>
+                      <a:r>
+                        <a:rPr sz="800" b="0">
+                          <a:solidFill>
+                            <a:srgbClr val="565C66"/>
+                          </a:solidFill>
+                          <a:latin typeface="Malgun Gothic"/>
+                          <a:ea typeface="Malgun Gothic"/>
+                          <a:cs typeface="Malgun Gothic"/>
+                        </a:rPr>
                         <a:t>0.000</a:t>
                       </a:r>
                     </a:p>
@@ -13135,7 +13806,7 @@
                         </a:lnSpc>
                       </a:pPr>
                       <a:r>
-                        <a:rPr sz="850" b="1">
+                        <a:rPr sz="800" b="1">
                           <a:solidFill>
                             <a:srgbClr val="C1442A"/>
                           </a:solidFill>
@@ -13164,7 +13835,7 @@
                         </a:lnSpc>
                       </a:pPr>
                       <a:r>
-                        <a:rPr sz="850" b="0">
+                        <a:rPr sz="800" b="0">
                           <a:solidFill>
                             <a:srgbClr val="565C66"/>
                           </a:solidFill>
@@ -13193,7 +13864,7 @@
                         </a:lnSpc>
                       </a:pPr>
                       <a:r>
-                        <a:rPr sz="850" b="1">
+                        <a:rPr sz="800" b="1">
                           <a:solidFill>
                             <a:srgbClr val="C1442A"/>
                           </a:solidFill>
@@ -13202,35 +13873,6 @@
                           <a:cs typeface="Malgun Gothic"/>
                         </a:rPr>
                         <a:t>−1 (잡음)</a:t>
-                      </a:r>
-                    </a:p>
-                  </a:txBody>
-                  <a:tcPr marL="82296" marR="82296" marT="41148" marB="41148" anchor="ctr">
-                    <a:solidFill>
-                      <a:srgbClr val="FFFFFF"/>
-                    </a:solidFill>
-                  </a:tcPr>
-                </a:tc>
-                <a:tc>
-                  <a:txBody>
-                    <a:bodyPr wrap="square"/>
-                    <a:lstStyle/>
-                    <a:p>
-                      <a:pPr algn="r">
-                        <a:lnSpc>
-                          <a:spcPct val="115000"/>
-                        </a:lnSpc>
-                      </a:pPr>
-                      <a:r>
-                        <a:rPr sz="850" b="1">
-                          <a:solidFill>
-                            <a:srgbClr val="C1442A"/>
-                          </a:solidFill>
-                          <a:latin typeface="Malgun Gothic"/>
-                          <a:ea typeface="Malgun Gothic"/>
-                          <a:cs typeface="Malgun Gothic"/>
-                        </a:rPr>
-                        <a:t>0.096 (P14)</a:t>
                       </a:r>
                     </a:p>
                   </a:txBody>
